--- a/1С_Предприятие/практика 3.pptx
+++ b/1С_Предприятие/практика 3.pptx
@@ -295,7 +295,7 @@
             <a:fld id="{73B3F00B-5153-408B-8A94-3DD3D25A491A}" type="datetimeFigureOut">
               <a:rPr lang="ru-RU" smtClean="0"/>
               <a:pPr/>
-              <a:t>14.03.2026</a:t>
+              <a:t>22.03.2026</a:t>
             </a:fld>
             <a:endParaRPr lang="ru-RU"/>
           </a:p>
@@ -462,7 +462,7 @@
             <a:fld id="{73B3F00B-5153-408B-8A94-3DD3D25A491A}" type="datetimeFigureOut">
               <a:rPr lang="ru-RU" smtClean="0"/>
               <a:pPr/>
-              <a:t>14.03.2026</a:t>
+              <a:t>22.03.2026</a:t>
             </a:fld>
             <a:endParaRPr lang="ru-RU"/>
           </a:p>
@@ -639,7 +639,7 @@
             <a:fld id="{73B3F00B-5153-408B-8A94-3DD3D25A491A}" type="datetimeFigureOut">
               <a:rPr lang="ru-RU" smtClean="0"/>
               <a:pPr/>
-              <a:t>14.03.2026</a:t>
+              <a:t>22.03.2026</a:t>
             </a:fld>
             <a:endParaRPr lang="ru-RU"/>
           </a:p>
@@ -806,7 +806,7 @@
             <a:fld id="{73B3F00B-5153-408B-8A94-3DD3D25A491A}" type="datetimeFigureOut">
               <a:rPr lang="ru-RU" smtClean="0"/>
               <a:pPr/>
-              <a:t>14.03.2026</a:t>
+              <a:t>22.03.2026</a:t>
             </a:fld>
             <a:endParaRPr lang="ru-RU"/>
           </a:p>
@@ -1049,7 +1049,7 @@
             <a:fld id="{73B3F00B-5153-408B-8A94-3DD3D25A491A}" type="datetimeFigureOut">
               <a:rPr lang="ru-RU" smtClean="0"/>
               <a:pPr/>
-              <a:t>14.03.2026</a:t>
+              <a:t>22.03.2026</a:t>
             </a:fld>
             <a:endParaRPr lang="ru-RU"/>
           </a:p>
@@ -1334,7 +1334,7 @@
             <a:fld id="{73B3F00B-5153-408B-8A94-3DD3D25A491A}" type="datetimeFigureOut">
               <a:rPr lang="ru-RU" smtClean="0"/>
               <a:pPr/>
-              <a:t>14.03.2026</a:t>
+              <a:t>22.03.2026</a:t>
             </a:fld>
             <a:endParaRPr lang="ru-RU"/>
           </a:p>
@@ -1753,7 +1753,7 @@
             <a:fld id="{73B3F00B-5153-408B-8A94-3DD3D25A491A}" type="datetimeFigureOut">
               <a:rPr lang="ru-RU" smtClean="0"/>
               <a:pPr/>
-              <a:t>14.03.2026</a:t>
+              <a:t>22.03.2026</a:t>
             </a:fld>
             <a:endParaRPr lang="ru-RU"/>
           </a:p>
@@ -1868,7 +1868,7 @@
             <a:fld id="{73B3F00B-5153-408B-8A94-3DD3D25A491A}" type="datetimeFigureOut">
               <a:rPr lang="ru-RU" smtClean="0"/>
               <a:pPr/>
-              <a:t>14.03.2026</a:t>
+              <a:t>22.03.2026</a:t>
             </a:fld>
             <a:endParaRPr lang="ru-RU"/>
           </a:p>
@@ -1960,7 +1960,7 @@
             <a:fld id="{73B3F00B-5153-408B-8A94-3DD3D25A491A}" type="datetimeFigureOut">
               <a:rPr lang="ru-RU" smtClean="0"/>
               <a:pPr/>
-              <a:t>14.03.2026</a:t>
+              <a:t>22.03.2026</a:t>
             </a:fld>
             <a:endParaRPr lang="ru-RU"/>
           </a:p>
@@ -2234,7 +2234,7 @@
             <a:fld id="{73B3F00B-5153-408B-8A94-3DD3D25A491A}" type="datetimeFigureOut">
               <a:rPr lang="ru-RU" smtClean="0"/>
               <a:pPr/>
-              <a:t>14.03.2026</a:t>
+              <a:t>22.03.2026</a:t>
             </a:fld>
             <a:endParaRPr lang="ru-RU"/>
           </a:p>
@@ -2484,7 +2484,7 @@
             <a:fld id="{73B3F00B-5153-408B-8A94-3DD3D25A491A}" type="datetimeFigureOut">
               <a:rPr lang="ru-RU" smtClean="0"/>
               <a:pPr/>
-              <a:t>14.03.2026</a:t>
+              <a:t>22.03.2026</a:t>
             </a:fld>
             <a:endParaRPr lang="ru-RU"/>
           </a:p>
@@ -2694,7 +2694,7 @@
             <a:fld id="{73B3F00B-5153-408B-8A94-3DD3D25A491A}" type="datetimeFigureOut">
               <a:rPr lang="ru-RU" smtClean="0"/>
               <a:pPr/>
-              <a:t>14.03.2026</a:t>
+              <a:t>22.03.2026</a:t>
             </a:fld>
             <a:endParaRPr lang="ru-RU"/>
           </a:p>
@@ -3177,14 +3177,7 @@
                 <a:latin typeface="Times New Roman" pitchFamily="18" charset="0"/>
                 <a:cs typeface="Times New Roman" pitchFamily="18" charset="0"/>
               </a:rPr>
-              <a:t>Запросы </a:t>
-            </a:r>
-            <a:r>
-              <a:rPr lang="ru-RU" sz="2800" b="1" dirty="0" smtClean="0">
-                <a:latin typeface="Times New Roman" pitchFamily="18" charset="0"/>
-                <a:cs typeface="Times New Roman" pitchFamily="18" charset="0"/>
-              </a:rPr>
-              <a:t>1С</a:t>
+              <a:t>Запросы 1С</a:t>
             </a:r>
           </a:p>
           <a:p>
@@ -3195,15 +3188,7 @@
                 <a:cs typeface="Times New Roman" pitchFamily="18" charset="0"/>
                 <a:hlinkClick r:id="rId2"/>
               </a:rPr>
-              <a:t>https://moscowsoft.com/statii/programmirovanie_na_1s_predpriyatie/zaprosy_1s/?</a:t>
-            </a:r>
-            <a:r>
-              <a:rPr lang="en-US" sz="2800" dirty="0" smtClean="0">
-                <a:latin typeface="Times New Roman" pitchFamily="18" charset="0"/>
-                <a:cs typeface="Times New Roman" pitchFamily="18" charset="0"/>
-                <a:hlinkClick r:id="rId2"/>
-              </a:rPr>
-              <a:t>ysclid=mmqduqlv3r123379193</a:t>
+              <a:t>https://moscowsoft.com/statii/programmirovanie_na_1s_predpriyatie/zaprosy_1s/?ysclid=mmqduqlv3r123379193</a:t>
             </a:r>
             <a:endParaRPr lang="en-US" sz="2800" dirty="0" smtClean="0">
               <a:latin typeface="Times New Roman" pitchFamily="18" charset="0"/>
@@ -3235,15 +3220,7 @@
                 <a:cs typeface="Times New Roman" pitchFamily="18" charset="0"/>
                 <a:hlinkClick r:id="rId3"/>
               </a:rPr>
-              <a:t>https://infostart.ru/1c/articles/181336/?</a:t>
-            </a:r>
-            <a:r>
-              <a:rPr lang="en-US" sz="2800" dirty="0" smtClean="0">
-                <a:latin typeface="Times New Roman" pitchFamily="18" charset="0"/>
-                <a:cs typeface="Times New Roman" pitchFamily="18" charset="0"/>
-                <a:hlinkClick r:id="rId3"/>
-              </a:rPr>
-              <a:t>ysclid=mmqezv0lpj607908977</a:t>
+              <a:t>https://infostart.ru/1c/articles/181336/?ysclid=mmqezv0lpj607908977</a:t>
             </a:r>
             <a:endParaRPr lang="en-US" sz="2800" dirty="0" smtClean="0">
               <a:latin typeface="Times New Roman" pitchFamily="18" charset="0"/>
@@ -3264,14 +3241,7 @@
                 <a:latin typeface="Times New Roman" pitchFamily="18" charset="0"/>
                 <a:cs typeface="Times New Roman" pitchFamily="18" charset="0"/>
               </a:rPr>
-              <a:t>Создание </a:t>
-            </a:r>
-            <a:r>
-              <a:rPr lang="ru-RU" sz="2800" b="1" dirty="0" smtClean="0">
-                <a:latin typeface="Times New Roman" pitchFamily="18" charset="0"/>
-                <a:cs typeface="Times New Roman" pitchFamily="18" charset="0"/>
-              </a:rPr>
-              <a:t>внешней обработки 1С</a:t>
+              <a:t>Создание внешней обработки 1С</a:t>
             </a:r>
           </a:p>
           <a:p>
@@ -3282,15 +3252,7 @@
                 <a:cs typeface="Times New Roman" pitchFamily="18" charset="0"/>
                 <a:hlinkClick r:id="rId4"/>
               </a:rPr>
-              <a:t>https://scloud.ru/techinfo_1c_online/sozdanie-vneshney-obrabotki-1s/sozdanie-vneshney-obrabotki-1s</a:t>
-            </a:r>
-            <a:r>
-              <a:rPr lang="en-US" sz="2800" dirty="0" smtClean="0">
-                <a:latin typeface="Times New Roman" pitchFamily="18" charset="0"/>
-                <a:cs typeface="Times New Roman" pitchFamily="18" charset="0"/>
-                <a:hlinkClick r:id="rId4"/>
-              </a:rPr>
-              <a:t>/</a:t>
+              <a:t>https://scloud.ru/techinfo_1c_online/sozdanie-vneshney-obrabotki-1s/sozdanie-vneshney-obrabotki-1s/</a:t>
             </a:r>
             <a:endParaRPr lang="en-US" sz="2800" dirty="0" smtClean="0">
               <a:latin typeface="Times New Roman" pitchFamily="18" charset="0"/>
@@ -3484,7 +3446,7 @@
         <p:spPr>
           <a:xfrm>
             <a:off x="0" y="0"/>
-            <a:ext cx="9144000" cy="3416320"/>
+            <a:ext cx="9144000" cy="2970044"/>
           </a:xfrm>
           <a:prstGeom prst="rect">
             <a:avLst/>
@@ -3498,20 +3460,20 @@
           <a:p>
             <a:pPr algn="just"/>
             <a:r>
-              <a:rPr lang="ru-RU" b="1" dirty="0" smtClean="0">
+              <a:rPr lang="ru-RU" sz="1700" b="1" dirty="0" smtClean="0">
                 <a:latin typeface="Times New Roman" pitchFamily="18" charset="0"/>
                 <a:cs typeface="Times New Roman" pitchFamily="18" charset="0"/>
               </a:rPr>
               <a:t>Механизм запросов</a:t>
             </a:r>
             <a:r>
-              <a:rPr lang="ru-RU" dirty="0" smtClean="0">
+              <a:rPr lang="ru-RU" sz="1700" dirty="0" smtClean="0">
                 <a:latin typeface="Times New Roman" pitchFamily="18" charset="0"/>
                 <a:cs typeface="Times New Roman" pitchFamily="18" charset="0"/>
               </a:rPr>
               <a:t> — это один из способов доступа к данным, которые поддерживает платформа. Используя этот механизм, разработчик может читать и обрабатывать данные, хранящиеся в информационной базе; изменение данных с помощью запросов невозможно. Это объясняется тем, что запросы специально предназначены для быстрого получения и обработки некоторой выборки из больших массивов данных, которые могут храниться в базе данных.</a:t>
             </a:r>
-            <a:endParaRPr lang="en-US" dirty="0" smtClean="0">
+            <a:endParaRPr lang="en-US" sz="1700" dirty="0" smtClean="0">
               <a:latin typeface="Times New Roman" pitchFamily="18" charset="0"/>
               <a:cs typeface="Times New Roman" pitchFamily="18" charset="0"/>
             </a:endParaRPr>
@@ -3519,96 +3481,50 @@
           <a:p>
             <a:pPr algn="just"/>
             <a:r>
-              <a:rPr lang="ru-RU" dirty="0" smtClean="0">
-                <a:latin typeface="Times New Roman" pitchFamily="18" charset="0"/>
-                <a:cs typeface="Times New Roman" pitchFamily="18" charset="0"/>
-              </a:rPr>
-              <a:t>1С‑запросы </a:t>
-            </a:r>
-            <a:r>
-              <a:rPr lang="ru-RU" dirty="0" smtClean="0">
-                <a:latin typeface="Times New Roman" pitchFamily="18" charset="0"/>
-                <a:cs typeface="Times New Roman" pitchFamily="18" charset="0"/>
-              </a:rPr>
-              <a:t>— это механизм в платформе «1С:Предприятие» для выборки и обработки данных из информационной </a:t>
-            </a:r>
-            <a:r>
-              <a:rPr lang="ru-RU" dirty="0" smtClean="0">
-                <a:latin typeface="Times New Roman" pitchFamily="18" charset="0"/>
-                <a:cs typeface="Times New Roman" pitchFamily="18" charset="0"/>
-              </a:rPr>
-              <a:t>базы.</a:t>
-            </a:r>
-            <a:r>
-              <a:rPr lang="en-US" dirty="0" smtClean="0">
+              <a:rPr lang="ru-RU" sz="1700" dirty="0" smtClean="0">
+                <a:latin typeface="Times New Roman" pitchFamily="18" charset="0"/>
+                <a:cs typeface="Times New Roman" pitchFamily="18" charset="0"/>
+              </a:rPr>
+              <a:t>1С‑запросы — это механизм в платформе «1С:Предприятие» для выборки и обработки данных из информационной базы.</a:t>
+            </a:r>
+            <a:r>
+              <a:rPr lang="en-US" sz="1700" dirty="0" smtClean="0">
                 <a:latin typeface="Times New Roman" pitchFamily="18" charset="0"/>
                 <a:cs typeface="Times New Roman" pitchFamily="18" charset="0"/>
               </a:rPr>
               <a:t> </a:t>
             </a:r>
             <a:r>
-              <a:rPr lang="ru-RU" dirty="0" smtClean="0">
-                <a:latin typeface="Times New Roman" pitchFamily="18" charset="0"/>
-                <a:cs typeface="Times New Roman" pitchFamily="18" charset="0"/>
-              </a:rPr>
-              <a:t>Запрос </a:t>
-            </a:r>
-            <a:r>
-              <a:rPr lang="ru-RU" dirty="0" smtClean="0">
-                <a:latin typeface="Times New Roman" pitchFamily="18" charset="0"/>
-                <a:cs typeface="Times New Roman" pitchFamily="18" charset="0"/>
-              </a:rPr>
-              <a:t>— это обращение к системе с просьбой: выбрать определённые данные из базы; выполнить их обработку (сгруппировать, отсортировать, вычислить).</a:t>
+              <a:rPr lang="ru-RU" sz="1700" dirty="0" smtClean="0">
+                <a:latin typeface="Times New Roman" pitchFamily="18" charset="0"/>
+                <a:cs typeface="Times New Roman" pitchFamily="18" charset="0"/>
+              </a:rPr>
+              <a:t>Запрос — это обращение к системе с просьбой: выбрать определённые данные из базы; выполнить их обработку (сгруппировать, отсортировать, вычислить).</a:t>
             </a:r>
           </a:p>
           <a:p>
             <a:pPr algn="just"/>
             <a:r>
-              <a:rPr lang="ru-RU" dirty="0" smtClean="0">
-                <a:latin typeface="Times New Roman" pitchFamily="18" charset="0"/>
-                <a:cs typeface="Times New Roman" pitchFamily="18" charset="0"/>
-              </a:rPr>
-              <a:t>Важно: запросы в 1С предназначены только для чтения данных — изменять информацию с их помощью </a:t>
-            </a:r>
-            <a:r>
-              <a:rPr lang="ru-RU" dirty="0" smtClean="0">
-                <a:latin typeface="Times New Roman" pitchFamily="18" charset="0"/>
-                <a:cs typeface="Times New Roman" pitchFamily="18" charset="0"/>
-              </a:rPr>
-              <a:t>нельзя.</a:t>
-            </a:r>
-            <a:r>
-              <a:rPr lang="en-US" dirty="0" smtClean="0">
+              <a:rPr lang="ru-RU" sz="1700" dirty="0" smtClean="0">
+                <a:latin typeface="Times New Roman" pitchFamily="18" charset="0"/>
+                <a:cs typeface="Times New Roman" pitchFamily="18" charset="0"/>
+              </a:rPr>
+              <a:t>Важно: запросы в 1С предназначены только для чтения данных — изменять информацию с их помощью нельзя.</a:t>
+            </a:r>
+            <a:r>
+              <a:rPr lang="en-US" sz="1700" dirty="0" smtClean="0">
                 <a:latin typeface="Times New Roman" pitchFamily="18" charset="0"/>
                 <a:cs typeface="Times New Roman" pitchFamily="18" charset="0"/>
               </a:rPr>
               <a:t> </a:t>
             </a:r>
             <a:r>
-              <a:rPr lang="ru-RU" dirty="0" smtClean="0">
-                <a:latin typeface="Times New Roman" pitchFamily="18" charset="0"/>
-                <a:cs typeface="Times New Roman" pitchFamily="18" charset="0"/>
-              </a:rPr>
-              <a:t>Язык </a:t>
-            </a:r>
-            <a:r>
-              <a:rPr lang="ru-RU" dirty="0" smtClean="0">
-                <a:latin typeface="Times New Roman" pitchFamily="18" charset="0"/>
-                <a:cs typeface="Times New Roman" pitchFamily="18" charset="0"/>
-              </a:rPr>
-              <a:t>запросов 1С базируется на стандартном SQL</a:t>
-            </a:r>
-            <a:r>
-              <a:rPr lang="ru-RU" dirty="0" smtClean="0">
-                <a:latin typeface="Times New Roman" pitchFamily="18" charset="0"/>
-                <a:cs typeface="Times New Roman" pitchFamily="18" charset="0"/>
-              </a:rPr>
-              <a:t>.</a:t>
-            </a:r>
-            <a:endParaRPr lang="ru-RU" dirty="0" smtClean="0">
-              <a:latin typeface="Times New Roman" pitchFamily="18" charset="0"/>
-              <a:cs typeface="Times New Roman" pitchFamily="18" charset="0"/>
-            </a:endParaRPr>
+              <a:rPr lang="ru-RU" sz="1700" dirty="0" smtClean="0">
+                <a:latin typeface="Times New Roman" pitchFamily="18" charset="0"/>
+                <a:cs typeface="Times New Roman" pitchFamily="18" charset="0"/>
+              </a:rPr>
+              <a:t>Язык запросов 1С базируется на стандартном SQL.</a:t>
+            </a:r>
           </a:p>
         </p:txBody>
       </p:sp>
@@ -3629,8 +3545,8 @@
         </p:blipFill>
         <p:spPr bwMode="auto">
           <a:xfrm>
-            <a:off x="1" y="3439116"/>
-            <a:ext cx="3571868" cy="3418883"/>
+            <a:off x="1" y="3857628"/>
+            <a:ext cx="3571868" cy="3000371"/>
           </a:xfrm>
           <a:prstGeom prst="rect">
             <a:avLst/>
@@ -3640,7 +3556,7 @@
       </p:pic>
       <p:pic>
         <p:nvPicPr>
-          <p:cNvPr id="16387" name="Picture 3"/>
+          <p:cNvPr id="16388" name="Picture 4"/>
           <p:cNvPicPr>
             <a:picLocks noChangeAspect="1" noChangeArrowheads="1"/>
           </p:cNvPicPr>
@@ -3648,15 +3564,15 @@
         </p:nvPicPr>
         <p:blipFill>
           <a:blip r:embed="rId3"/>
-          <a:srcRect/>
+          <a:srcRect t="24456"/>
           <a:stretch>
             <a:fillRect/>
           </a:stretch>
         </p:blipFill>
         <p:spPr bwMode="auto">
           <a:xfrm>
-            <a:off x="3714744" y="3643314"/>
-            <a:ext cx="5219700" cy="685800"/>
+            <a:off x="3786182" y="4643446"/>
+            <a:ext cx="3429024" cy="882656"/>
           </a:xfrm>
           <a:prstGeom prst="rect">
             <a:avLst/>
@@ -3671,53 +3587,20 @@
           <a:effectLst/>
         </p:spPr>
       </p:pic>
-      <p:pic>
-        <p:nvPicPr>
-          <p:cNvPr id="16388" name="Picture 4"/>
-          <p:cNvPicPr>
-            <a:picLocks noChangeAspect="1" noChangeArrowheads="1"/>
-          </p:cNvPicPr>
+      <p:sp>
+        <p:nvSpPr>
+          <p:cNvPr id="6" name="Прямоугольник 5"/>
+          <p:cNvSpPr/>
           <p:nvPr/>
-        </p:nvPicPr>
-        <p:blipFill>
-          <a:blip r:embed="rId4"/>
-          <a:srcRect t="24456"/>
-          <a:stretch>
-            <a:fillRect/>
-          </a:stretch>
-        </p:blipFill>
-        <p:spPr bwMode="auto">
+        </p:nvSpPr>
+        <p:spPr>
           <a:xfrm>
-            <a:off x="3786182" y="4643446"/>
-            <a:ext cx="3429024" cy="882656"/>
+            <a:off x="4143372" y="5857892"/>
+            <a:ext cx="4596130" cy="646331"/>
           </a:xfrm>
           <a:prstGeom prst="rect">
             <a:avLst/>
           </a:prstGeom>
-          <a:noFill/>
-          <a:ln w="9525">
-            <a:noFill/>
-            <a:miter lim="800000"/>
-            <a:headEnd/>
-            <a:tailEnd/>
-          </a:ln>
-          <a:effectLst/>
-        </p:spPr>
-      </p:pic>
-      <p:sp>
-        <p:nvSpPr>
-          <p:cNvPr id="6" name="Прямоугольник 5"/>
-          <p:cNvSpPr/>
-          <p:nvPr/>
-        </p:nvSpPr>
-        <p:spPr>
-          <a:xfrm>
-            <a:off x="4143372" y="5857892"/>
-            <a:ext cx="4596130" cy="369332"/>
-          </a:xfrm>
-          <a:prstGeom prst="rect">
-            <a:avLst/>
-          </a:prstGeom>
         </p:spPr>
         <p:txBody>
           <a:bodyPr wrap="none">
@@ -3746,6 +3629,30 @@
                 <a:cs typeface="Courier New" pitchFamily="49" charset="0"/>
               </a:rPr>
               <a:t>Выборка.Сумма</a:t>
+            </a:r>
+            <a:r>
+              <a:rPr lang="ru-RU" dirty="0" smtClean="0">
+                <a:latin typeface="Courier New" pitchFamily="49" charset="0"/>
+                <a:cs typeface="Courier New" pitchFamily="49" charset="0"/>
+              </a:rPr>
+              <a:t>;</a:t>
+            </a:r>
+          </a:p>
+          <a:p>
+            <a:pPr algn="just"/>
+            <a:r>
+              <a:rPr lang="ru-RU" dirty="0" smtClean="0">
+                <a:latin typeface="Courier New" pitchFamily="49" charset="0"/>
+                <a:cs typeface="Courier New" pitchFamily="49" charset="0"/>
+              </a:rPr>
+              <a:t>Возврат </a:t>
+            </a:r>
+            <a:r>
+              <a:rPr lang="ru-RU" dirty="0" err="1" smtClean="0">
+                <a:latin typeface="Courier New" pitchFamily="49" charset="0"/>
+                <a:cs typeface="Courier New" pitchFamily="49" charset="0"/>
+              </a:rPr>
+              <a:t>СуммаРезультата</a:t>
             </a:r>
             <a:r>
               <a:rPr lang="ru-RU" dirty="0" smtClean="0">
@@ -3839,6 +3746,75 @@
           </a:p>
         </p:txBody>
       </p:sp>
+      <p:pic>
+        <p:nvPicPr>
+          <p:cNvPr id="1026" name="Picture 2"/>
+          <p:cNvPicPr>
+            <a:picLocks noChangeAspect="1" noChangeArrowheads="1"/>
+          </p:cNvPicPr>
+          <p:nvPr/>
+        </p:nvPicPr>
+        <p:blipFill>
+          <a:blip r:embed="rId4"/>
+          <a:srcRect/>
+          <a:stretch>
+            <a:fillRect/>
+          </a:stretch>
+        </p:blipFill>
+        <p:spPr bwMode="auto">
+          <a:xfrm>
+            <a:off x="0" y="2857496"/>
+            <a:ext cx="9144000" cy="1104900"/>
+          </a:xfrm>
+          <a:prstGeom prst="rect">
+            <a:avLst/>
+          </a:prstGeom>
+          <a:noFill/>
+          <a:ln w="9525">
+            <a:noFill/>
+            <a:miter lim="800000"/>
+            <a:headEnd/>
+            <a:tailEnd/>
+          </a:ln>
+          <a:effectLst/>
+        </p:spPr>
+      </p:pic>
+      <p:cxnSp>
+        <p:nvCxnSpPr>
+          <p:cNvPr id="10" name="Прямая со стрелкой 9"/>
+          <p:cNvCxnSpPr/>
+          <p:nvPr/>
+        </p:nvCxnSpPr>
+        <p:spPr>
+          <a:xfrm>
+            <a:off x="2643174" y="3786190"/>
+            <a:ext cx="2143140" cy="1000132"/>
+          </a:xfrm>
+          <a:prstGeom prst="straightConnector1">
+            <a:avLst/>
+          </a:prstGeom>
+          <a:ln w="19050">
+            <a:solidFill>
+              <a:srgbClr val="FF0000"/>
+            </a:solidFill>
+            <a:tailEnd type="arrow"/>
+          </a:ln>
+        </p:spPr>
+        <p:style>
+          <a:lnRef idx="1">
+            <a:schemeClr val="accent1"/>
+          </a:lnRef>
+          <a:fillRef idx="0">
+            <a:schemeClr val="accent1"/>
+          </a:fillRef>
+          <a:effectRef idx="0">
+            <a:schemeClr val="accent1"/>
+          </a:effectRef>
+          <a:fontRef idx="minor">
+            <a:schemeClr val="tx1"/>
+          </a:fontRef>
+        </p:style>
+      </p:cxnSp>
     </p:spTree>
   </p:cSld>
   <p:clrMapOvr>
@@ -3931,35 +3907,21 @@
                 <a:latin typeface="Times New Roman" pitchFamily="18" charset="0"/>
                 <a:cs typeface="Times New Roman" pitchFamily="18" charset="0"/>
               </a:rPr>
-              <a:t> — это механизм, позволяющий применять различное оформление к выводимой на экран информации в зависимости от условий. Можно изменить цвет фона, текста, шрифт и т. п</a:t>
+              <a:t> — это механизм, позволяющий применять различное оформление к выводимой на экран информации в зависимости от условий. Можно изменить цвет фона, текста, шрифт и т. п.</a:t>
+            </a:r>
+            <a:r>
+              <a:rPr lang="en-US" sz="2400" dirty="0" smtClean="0">
+                <a:latin typeface="Times New Roman" pitchFamily="18" charset="0"/>
+                <a:cs typeface="Times New Roman" pitchFamily="18" charset="0"/>
+              </a:rPr>
+              <a:t> </a:t>
             </a:r>
             <a:r>
               <a:rPr lang="ru-RU" sz="2400" dirty="0" smtClean="0">
                 <a:latin typeface="Times New Roman" pitchFamily="18" charset="0"/>
                 <a:cs typeface="Times New Roman" pitchFamily="18" charset="0"/>
               </a:rPr>
-              <a:t>.</a:t>
-            </a:r>
-            <a:r>
-              <a:rPr lang="en-US" sz="2400" dirty="0" smtClean="0">
-                <a:latin typeface="Times New Roman" pitchFamily="18" charset="0"/>
-                <a:cs typeface="Times New Roman" pitchFamily="18" charset="0"/>
-              </a:rPr>
-              <a:t> </a:t>
-            </a:r>
-            <a:r>
-              <a:rPr lang="ru-RU" sz="2400" dirty="0" smtClean="0">
-                <a:latin typeface="Times New Roman" pitchFamily="18" charset="0"/>
-                <a:cs typeface="Times New Roman" pitchFamily="18" charset="0"/>
-              </a:rPr>
-              <a:t>Условное оформление доступно в управляемых формах (как в формах отдельных объектов, так и в формах списка), а также в отчётах, разработанных с использованием </a:t>
-            </a:r>
-            <a:r>
-              <a:rPr lang="ru-RU" sz="2400" dirty="0" smtClean="0">
-                <a:latin typeface="Times New Roman" pitchFamily="18" charset="0"/>
-                <a:cs typeface="Times New Roman" pitchFamily="18" charset="0"/>
-              </a:rPr>
-              <a:t>СКД</a:t>
+              <a:t>Условное оформление доступно в управляемых формах (как в формах отдельных объектов, так и в формах списка), а также в отчётах, разработанных с использованием СКД</a:t>
             </a:r>
             <a:r>
               <a:rPr lang="en-US" sz="2400" dirty="0" smtClean="0">
@@ -4424,7 +4386,7 @@
         <p:spPr>
           <a:xfrm>
             <a:off x="0" y="0"/>
-            <a:ext cx="9144000" cy="3693319"/>
+            <a:ext cx="9144000" cy="3493264"/>
           </a:xfrm>
           <a:prstGeom prst="rect">
             <a:avLst/>
@@ -4438,7 +4400,7 @@
           <a:p>
             <a:pPr algn="just"/>
             <a:r>
-              <a:rPr lang="ru-RU" dirty="0" smtClean="0">
+              <a:rPr lang="ru-RU" sz="1700" dirty="0" smtClean="0">
                 <a:latin typeface="Times New Roman" pitchFamily="18" charset="0"/>
                 <a:cs typeface="Times New Roman" pitchFamily="18" charset="0"/>
               </a:rPr>
@@ -4448,28 +4410,28 @@
           <a:p>
             <a:pPr algn="just"/>
             <a:r>
-              <a:rPr lang="ru-RU" b="1" dirty="0" smtClean="0">
+              <a:rPr lang="ru-RU" sz="1700" b="1" dirty="0" smtClean="0">
                 <a:latin typeface="Times New Roman" pitchFamily="18" charset="0"/>
                 <a:cs typeface="Times New Roman" pitchFamily="18" charset="0"/>
               </a:rPr>
               <a:t>Внешняя обработка </a:t>
             </a:r>
             <a:r>
-              <a:rPr lang="ru-RU" dirty="0" smtClean="0">
+              <a:rPr lang="ru-RU" sz="1700" dirty="0" smtClean="0">
                 <a:latin typeface="Times New Roman" pitchFamily="18" charset="0"/>
                 <a:cs typeface="Times New Roman" pitchFamily="18" charset="0"/>
               </a:rPr>
               <a:t>— это файл с расширением *.</a:t>
             </a:r>
             <a:r>
-              <a:rPr lang="ru-RU" dirty="0" err="1" smtClean="0">
+              <a:rPr lang="ru-RU" sz="1700" dirty="0" err="1" smtClean="0">
                 <a:latin typeface="Times New Roman" pitchFamily="18" charset="0"/>
                 <a:cs typeface="Times New Roman" pitchFamily="18" charset="0"/>
               </a:rPr>
               <a:t>epf</a:t>
             </a:r>
             <a:r>
-              <a:rPr lang="ru-RU" dirty="0" smtClean="0">
+              <a:rPr lang="ru-RU" sz="1700" dirty="0" smtClean="0">
                 <a:latin typeface="Times New Roman" pitchFamily="18" charset="0"/>
                 <a:cs typeface="Times New Roman" pitchFamily="18" charset="0"/>
               </a:rPr>
@@ -4479,208 +4441,96 @@
           <a:p>
             <a:pPr algn="just"/>
             <a:r>
-              <a:rPr lang="ru-RU" dirty="0" smtClean="0">
+              <a:rPr lang="ru-RU" sz="1700" dirty="0" smtClean="0">
                 <a:latin typeface="Times New Roman" pitchFamily="18" charset="0"/>
                 <a:cs typeface="Times New Roman" pitchFamily="18" charset="0"/>
               </a:rPr>
               <a:t>она:</a:t>
             </a:r>
             <a:r>
-              <a:rPr lang="en-US" dirty="0" smtClean="0">
+              <a:rPr lang="en-US" sz="1700" dirty="0" smtClean="0">
                 <a:latin typeface="Times New Roman" pitchFamily="18" charset="0"/>
                 <a:cs typeface="Times New Roman" pitchFamily="18" charset="0"/>
               </a:rPr>
               <a:t> </a:t>
             </a:r>
             <a:r>
-              <a:rPr lang="ru-RU" dirty="0" smtClean="0">
-                <a:latin typeface="Times New Roman" pitchFamily="18" charset="0"/>
-                <a:cs typeface="Times New Roman" pitchFamily="18" charset="0"/>
-              </a:rPr>
-              <a:t>не </a:t>
-            </a:r>
-            <a:r>
-              <a:rPr lang="ru-RU" dirty="0" smtClean="0">
-                <a:latin typeface="Times New Roman" pitchFamily="18" charset="0"/>
-                <a:cs typeface="Times New Roman" pitchFamily="18" charset="0"/>
-              </a:rPr>
-              <a:t>входит в </a:t>
-            </a:r>
-            <a:r>
-              <a:rPr lang="ru-RU" dirty="0" smtClean="0">
-                <a:latin typeface="Times New Roman" pitchFamily="18" charset="0"/>
-                <a:cs typeface="Times New Roman" pitchFamily="18" charset="0"/>
-              </a:rPr>
-              <a:t>конфигурацию;</a:t>
-            </a:r>
-            <a:r>
-              <a:rPr lang="en-US" dirty="0" smtClean="0">
+              <a:rPr lang="ru-RU" sz="1700" dirty="0" smtClean="0">
+                <a:latin typeface="Times New Roman" pitchFamily="18" charset="0"/>
+                <a:cs typeface="Times New Roman" pitchFamily="18" charset="0"/>
+              </a:rPr>
+              <a:t>не входит в конфигурацию;</a:t>
+            </a:r>
+            <a:r>
+              <a:rPr lang="en-US" sz="1700" dirty="0" smtClean="0">
                 <a:latin typeface="Times New Roman" pitchFamily="18" charset="0"/>
                 <a:cs typeface="Times New Roman" pitchFamily="18" charset="0"/>
               </a:rPr>
               <a:t> </a:t>
             </a:r>
             <a:r>
-              <a:rPr lang="ru-RU" dirty="0" smtClean="0">
-                <a:latin typeface="Times New Roman" pitchFamily="18" charset="0"/>
-                <a:cs typeface="Times New Roman" pitchFamily="18" charset="0"/>
-              </a:rPr>
-              <a:t>хранится </a:t>
-            </a:r>
-            <a:r>
-              <a:rPr lang="ru-RU" dirty="0" smtClean="0">
-                <a:latin typeface="Times New Roman" pitchFamily="18" charset="0"/>
-                <a:cs typeface="Times New Roman" pitchFamily="18" charset="0"/>
-              </a:rPr>
-              <a:t>как отдельный файл на </a:t>
-            </a:r>
-            <a:r>
-              <a:rPr lang="ru-RU" dirty="0" smtClean="0">
-                <a:latin typeface="Times New Roman" pitchFamily="18" charset="0"/>
-                <a:cs typeface="Times New Roman" pitchFamily="18" charset="0"/>
-              </a:rPr>
-              <a:t>диске;</a:t>
-            </a:r>
-            <a:r>
-              <a:rPr lang="en-US" dirty="0" smtClean="0">
+              <a:rPr lang="ru-RU" sz="1700" dirty="0" smtClean="0">
+                <a:latin typeface="Times New Roman" pitchFamily="18" charset="0"/>
+                <a:cs typeface="Times New Roman" pitchFamily="18" charset="0"/>
+              </a:rPr>
+              <a:t>хранится как отдельный файл на диске;</a:t>
+            </a:r>
+            <a:r>
+              <a:rPr lang="en-US" sz="1700" dirty="0" smtClean="0">
                 <a:latin typeface="Times New Roman" pitchFamily="18" charset="0"/>
                 <a:cs typeface="Times New Roman" pitchFamily="18" charset="0"/>
               </a:rPr>
               <a:t> </a:t>
             </a:r>
             <a:r>
-              <a:rPr lang="ru-RU" dirty="0" smtClean="0">
-                <a:latin typeface="Times New Roman" pitchFamily="18" charset="0"/>
-                <a:cs typeface="Times New Roman" pitchFamily="18" charset="0"/>
-              </a:rPr>
-              <a:t>подключается </a:t>
-            </a:r>
-            <a:r>
-              <a:rPr lang="ru-RU" dirty="0" smtClean="0">
-                <a:latin typeface="Times New Roman" pitchFamily="18" charset="0"/>
-                <a:cs typeface="Times New Roman" pitchFamily="18" charset="0"/>
-              </a:rPr>
-              <a:t>к базе по мере необходимости.</a:t>
+              <a:rPr lang="ru-RU" sz="1700" dirty="0" smtClean="0">
+                <a:latin typeface="Times New Roman" pitchFamily="18" charset="0"/>
+                <a:cs typeface="Times New Roman" pitchFamily="18" charset="0"/>
+              </a:rPr>
+              <a:t>подключается к базе по мере необходимости.</a:t>
             </a:r>
           </a:p>
           <a:p>
             <a:pPr algn="just"/>
             <a:r>
-              <a:rPr lang="ru-RU" dirty="0" smtClean="0">
-                <a:latin typeface="Times New Roman" pitchFamily="18" charset="0"/>
-                <a:cs typeface="Times New Roman" pitchFamily="18" charset="0"/>
-              </a:rPr>
-              <a:t>Основные цели </a:t>
-            </a:r>
-            <a:r>
-              <a:rPr lang="ru-RU" dirty="0" smtClean="0">
-                <a:latin typeface="Times New Roman" pitchFamily="18" charset="0"/>
-                <a:cs typeface="Times New Roman" pitchFamily="18" charset="0"/>
-              </a:rPr>
-              <a:t>использования</a:t>
-            </a:r>
-            <a:r>
-              <a:rPr lang="en-US" dirty="0" smtClean="0">
-                <a:latin typeface="Times New Roman" pitchFamily="18" charset="0"/>
-                <a:cs typeface="Times New Roman" pitchFamily="18" charset="0"/>
-              </a:rPr>
-              <a:t>:</a:t>
-            </a:r>
-            <a:r>
-              <a:rPr lang="en-US" dirty="0" smtClean="0">
-                <a:latin typeface="Times New Roman" pitchFamily="18" charset="0"/>
-                <a:cs typeface="Times New Roman" pitchFamily="18" charset="0"/>
-              </a:rPr>
-              <a:t> </a:t>
-            </a:r>
-            <a:r>
-              <a:rPr lang="ru-RU" dirty="0" smtClean="0">
-                <a:latin typeface="Times New Roman" pitchFamily="18" charset="0"/>
-                <a:cs typeface="Times New Roman" pitchFamily="18" charset="0"/>
-              </a:rPr>
-              <a:t>р</a:t>
-            </a:r>
-            <a:r>
-              <a:rPr lang="ru-RU" dirty="0" smtClean="0">
-                <a:latin typeface="Times New Roman" pitchFamily="18" charset="0"/>
-                <a:cs typeface="Times New Roman" pitchFamily="18" charset="0"/>
-              </a:rPr>
-              <a:t>асширение </a:t>
-            </a:r>
-            <a:r>
-              <a:rPr lang="ru-RU" dirty="0" smtClean="0">
-                <a:latin typeface="Times New Roman" pitchFamily="18" charset="0"/>
-                <a:cs typeface="Times New Roman" pitchFamily="18" charset="0"/>
-              </a:rPr>
-              <a:t>функционала без изменения конфигурации</a:t>
+              <a:rPr lang="ru-RU" sz="1700" dirty="0" smtClean="0">
+                <a:latin typeface="Times New Roman" pitchFamily="18" charset="0"/>
+                <a:cs typeface="Times New Roman" pitchFamily="18" charset="0"/>
+              </a:rPr>
+              <a:t>Основные цели использования</a:t>
+            </a:r>
+            <a:r>
+              <a:rPr lang="en-US" sz="1700" dirty="0" smtClean="0">
+                <a:latin typeface="Times New Roman" pitchFamily="18" charset="0"/>
+                <a:cs typeface="Times New Roman" pitchFamily="18" charset="0"/>
+              </a:rPr>
+              <a:t>: </a:t>
+            </a:r>
+            <a:r>
+              <a:rPr lang="ru-RU" sz="1700" dirty="0" smtClean="0">
+                <a:latin typeface="Times New Roman" pitchFamily="18" charset="0"/>
+                <a:cs typeface="Times New Roman" pitchFamily="18" charset="0"/>
+              </a:rPr>
+              <a:t>расширение функционала без изменения конфигурации</a:t>
             </a:r>
           </a:p>
           <a:p>
             <a:pPr algn="just"/>
             <a:r>
-              <a:rPr lang="ru-RU" dirty="0" smtClean="0">
-                <a:latin typeface="Times New Roman" pitchFamily="18" charset="0"/>
-                <a:cs typeface="Times New Roman" pitchFamily="18" charset="0"/>
-              </a:rPr>
-              <a:t>Позволяет добавить новые возможности в типовую конфигурацию (например, «Бухгалтерию 8», «Управление торговлей»), не внося изменений в саму конфигурацию. Это особенно важно, </a:t>
-            </a:r>
-            <a:r>
-              <a:rPr lang="ru-RU" dirty="0" smtClean="0">
-                <a:latin typeface="Times New Roman" pitchFamily="18" charset="0"/>
-                <a:cs typeface="Times New Roman" pitchFamily="18" charset="0"/>
-              </a:rPr>
-              <a:t>если: вы </a:t>
-            </a:r>
-            <a:r>
-              <a:rPr lang="ru-RU" dirty="0" smtClean="0">
-                <a:latin typeface="Times New Roman" pitchFamily="18" charset="0"/>
-                <a:cs typeface="Times New Roman" pitchFamily="18" charset="0"/>
-              </a:rPr>
-              <a:t>находитесь на поддержке поставщика </a:t>
-            </a:r>
-            <a:r>
-              <a:rPr lang="ru-RU" dirty="0" smtClean="0">
-                <a:latin typeface="Times New Roman" pitchFamily="18" charset="0"/>
-                <a:cs typeface="Times New Roman" pitchFamily="18" charset="0"/>
-              </a:rPr>
-              <a:t>конфигурации; не </a:t>
-            </a:r>
-            <a:r>
-              <a:rPr lang="ru-RU" dirty="0" smtClean="0">
-                <a:latin typeface="Times New Roman" pitchFamily="18" charset="0"/>
-                <a:cs typeface="Times New Roman" pitchFamily="18" charset="0"/>
-              </a:rPr>
-              <a:t>хотите усложнять </a:t>
-            </a:r>
-            <a:r>
-              <a:rPr lang="ru-RU" dirty="0" smtClean="0">
-                <a:latin typeface="Times New Roman" pitchFamily="18" charset="0"/>
-                <a:cs typeface="Times New Roman" pitchFamily="18" charset="0"/>
-              </a:rPr>
-              <a:t>обновления. Быстрое </a:t>
-            </a:r>
-            <a:r>
-              <a:rPr lang="ru-RU" dirty="0" smtClean="0">
-                <a:latin typeface="Times New Roman" pitchFamily="18" charset="0"/>
-                <a:cs typeface="Times New Roman" pitchFamily="18" charset="0"/>
-              </a:rPr>
-              <a:t>решение локальных </a:t>
-            </a:r>
-            <a:r>
-              <a:rPr lang="ru-RU" dirty="0" smtClean="0">
-                <a:latin typeface="Times New Roman" pitchFamily="18" charset="0"/>
-                <a:cs typeface="Times New Roman" pitchFamily="18" charset="0"/>
-              </a:rPr>
-              <a:t>задач</a:t>
-            </a:r>
-            <a:r>
-              <a:rPr lang="en-US" dirty="0" smtClean="0">
+              <a:rPr lang="ru-RU" sz="1700" dirty="0" smtClean="0">
+                <a:latin typeface="Times New Roman" pitchFamily="18" charset="0"/>
+                <a:cs typeface="Times New Roman" pitchFamily="18" charset="0"/>
+              </a:rPr>
+              <a:t>Позволяет добавить новые возможности в типовую конфигурацию (например, «Бухгалтерию 8», «Управление торговлей»), не внося изменений в саму конфигурацию. Это особенно важно, если: вы находитесь на поддержке поставщика конфигурации; не хотите усложнять обновления. Быстрое решение локальных задач</a:t>
+            </a:r>
+            <a:r>
+              <a:rPr lang="en-US" sz="1700" dirty="0" smtClean="0">
                 <a:latin typeface="Times New Roman" pitchFamily="18" charset="0"/>
                 <a:cs typeface="Times New Roman" pitchFamily="18" charset="0"/>
               </a:rPr>
               <a:t>.</a:t>
             </a:r>
-            <a:endParaRPr lang="ru-RU" dirty="0">
+            <a:endParaRPr lang="ru-RU" sz="1700" dirty="0">
               <a:latin typeface="Times New Roman" pitchFamily="18" charset="0"/>
               <a:cs typeface="Times New Roman" pitchFamily="18" charset="0"/>
             </a:endParaRPr>
@@ -4787,14 +4637,7 @@
                 <a:latin typeface="Times New Roman" pitchFamily="18" charset="0"/>
                 <a:cs typeface="Times New Roman" pitchFamily="18" charset="0"/>
               </a:rPr>
-              <a:t>() возвращает объекты в порядке иерархии: сначала сама группа, затем её подгруппы и элементы внутри </a:t>
-            </a:r>
-            <a:r>
-              <a:rPr lang="ru-RU" sz="1200" dirty="0" smtClean="0">
-                <a:latin typeface="Times New Roman" pitchFamily="18" charset="0"/>
-                <a:cs typeface="Times New Roman" pitchFamily="18" charset="0"/>
-              </a:rPr>
-              <a:t>них.</a:t>
+              <a:t>() возвращает объекты в порядке иерархии: сначала сама группа, затем её подгруппы и элементы внутри них.</a:t>
             </a:r>
           </a:p>
         </p:txBody>
@@ -4916,6 +4759,164 @@
           <a:p>
             <a:pPr algn="ctr"/>
             <a:endParaRPr lang="ru-RU"/>
+          </a:p>
+        </p:txBody>
+      </p:sp>
+      <p:cxnSp>
+        <p:nvCxnSpPr>
+          <p:cNvPr id="10" name="Прямая со стрелкой 9"/>
+          <p:cNvCxnSpPr/>
+          <p:nvPr/>
+        </p:nvCxnSpPr>
+        <p:spPr>
+          <a:xfrm rot="16200000" flipH="1">
+            <a:off x="8465372" y="3821908"/>
+            <a:ext cx="285751" cy="71438"/>
+          </a:xfrm>
+          <a:prstGeom prst="straightConnector1">
+            <a:avLst/>
+          </a:prstGeom>
+          <a:ln w="19050">
+            <a:solidFill>
+              <a:srgbClr val="FF0000"/>
+            </a:solidFill>
+            <a:tailEnd type="arrow"/>
+          </a:ln>
+        </p:spPr>
+        <p:style>
+          <a:lnRef idx="1">
+            <a:schemeClr val="accent1"/>
+          </a:lnRef>
+          <a:fillRef idx="0">
+            <a:schemeClr val="accent1"/>
+          </a:fillRef>
+          <a:effectRef idx="0">
+            <a:schemeClr val="accent1"/>
+          </a:effectRef>
+          <a:fontRef idx="minor">
+            <a:schemeClr val="tx1"/>
+          </a:fontRef>
+        </p:style>
+      </p:cxnSp>
+      <p:sp>
+        <p:nvSpPr>
+          <p:cNvPr id="14" name="Прямоугольник 13"/>
+          <p:cNvSpPr/>
+          <p:nvPr/>
+        </p:nvSpPr>
+        <p:spPr>
+          <a:xfrm>
+            <a:off x="6858016" y="3429000"/>
+            <a:ext cx="2285984" cy="307777"/>
+          </a:xfrm>
+          <a:prstGeom prst="rect">
+            <a:avLst/>
+          </a:prstGeom>
+        </p:spPr>
+        <p:txBody>
+          <a:bodyPr wrap="square">
+            <a:spAutoFit/>
+          </a:bodyPr>
+          <a:lstStyle/>
+          <a:p>
+            <a:pPr algn="just"/>
+            <a:r>
+              <a:rPr lang="ru-RU" sz="1400" dirty="0" smtClean="0">
+                <a:latin typeface="Times New Roman" pitchFamily="18" charset="0"/>
+                <a:cs typeface="Times New Roman" pitchFamily="18" charset="0"/>
+              </a:rPr>
+              <a:t>Реквизит </a:t>
+            </a:r>
+            <a:r>
+              <a:rPr lang="ru-RU" sz="1400" dirty="0" err="1" smtClean="0">
+                <a:latin typeface="Times New Roman" pitchFamily="18" charset="0"/>
+                <a:cs typeface="Times New Roman" pitchFamily="18" charset="0"/>
+              </a:rPr>
+              <a:t>ГруппаТоваров</a:t>
+            </a:r>
+            <a:endParaRPr lang="ru-RU" sz="1400" dirty="0">
+              <a:latin typeface="Times New Roman" pitchFamily="18" charset="0"/>
+              <a:cs typeface="Times New Roman" pitchFamily="18" charset="0"/>
+            </a:endParaRPr>
+          </a:p>
+        </p:txBody>
+      </p:sp>
+      <p:cxnSp>
+        <p:nvCxnSpPr>
+          <p:cNvPr id="15" name="Прямая со стрелкой 14"/>
+          <p:cNvCxnSpPr/>
+          <p:nvPr/>
+        </p:nvCxnSpPr>
+        <p:spPr>
+          <a:xfrm rot="10800000" flipV="1">
+            <a:off x="7429522" y="4929198"/>
+            <a:ext cx="1143006" cy="142878"/>
+          </a:xfrm>
+          <a:prstGeom prst="straightConnector1">
+            <a:avLst/>
+          </a:prstGeom>
+          <a:ln w="19050">
+            <a:solidFill>
+              <a:srgbClr val="FF0000"/>
+            </a:solidFill>
+            <a:tailEnd type="arrow"/>
+          </a:ln>
+        </p:spPr>
+        <p:style>
+          <a:lnRef idx="1">
+            <a:schemeClr val="accent1"/>
+          </a:lnRef>
+          <a:fillRef idx="0">
+            <a:schemeClr val="accent1"/>
+          </a:fillRef>
+          <a:effectRef idx="0">
+            <a:schemeClr val="accent1"/>
+          </a:effectRef>
+          <a:fontRef idx="minor">
+            <a:schemeClr val="tx1"/>
+          </a:fontRef>
+        </p:style>
+      </p:cxnSp>
+      <p:sp>
+        <p:nvSpPr>
+          <p:cNvPr id="18" name="Прямоугольник 17"/>
+          <p:cNvSpPr/>
+          <p:nvPr/>
+        </p:nvSpPr>
+        <p:spPr>
+          <a:xfrm>
+            <a:off x="8358214" y="4786322"/>
+            <a:ext cx="785786" cy="707886"/>
+          </a:xfrm>
+          <a:prstGeom prst="rect">
+            <a:avLst/>
+          </a:prstGeom>
+        </p:spPr>
+        <p:txBody>
+          <a:bodyPr wrap="square">
+            <a:spAutoFit/>
+          </a:bodyPr>
+          <a:lstStyle/>
+          <a:p>
+            <a:pPr algn="just"/>
+            <a:r>
+              <a:rPr lang="ru-RU" sz="1000" dirty="0" smtClean="0">
+                <a:latin typeface="Times New Roman" pitchFamily="18" charset="0"/>
+                <a:cs typeface="Times New Roman" pitchFamily="18" charset="0"/>
+              </a:rPr>
+              <a:t>Реквизит </a:t>
+            </a:r>
+            <a:r>
+              <a:rPr lang="ru-RU" sz="1000" dirty="0" err="1" smtClean="0">
+                <a:latin typeface="Times New Roman" pitchFamily="18" charset="0"/>
+                <a:cs typeface="Times New Roman" pitchFamily="18" charset="0"/>
+              </a:rPr>
+              <a:t>НовыйПризнакНаличия</a:t>
+            </a:r>
+            <a:endParaRPr lang="ru-RU" sz="1000" dirty="0">
+              <a:latin typeface="Times New Roman" pitchFamily="18" charset="0"/>
+              <a:cs typeface="Times New Roman" pitchFamily="18" charset="0"/>
+            </a:endParaRPr>
           </a:p>
         </p:txBody>
       </p:sp>
